--- a/decks/maths-directed/maths-directed_ch3_adding.pptx
+++ b/decks/maths-directed/maths-directed_ch3_adding.pptx
@@ -121,47 +121,47 @@
   <p:extLst>
     <p:ext uri="{521415D9-36F7-43E2-AB2F-B90AF26B5E84}">
       <p14:sectionLst xmlns:p14="http://schemas.microsoft.com/office/powerpoint/2010/main">
-        <p14:section name="Opening" id="{b5773dbe-f42b-37f9-acda-dff13edde920}">
+        <p14:section name="Opening" id="{f18a30ad-c4c8-b7a2-e234-34dfbde3468e}">
           <p14:sldIdLst>
             <p14:sldId id="256"/>
           </p14:sldIdLst>
         </p14:section>
-        <p14:section name="Gate" id="{6b0d6cf1-a09d-a96b-67ca-f7313490f2d4}">
+        <p14:section name="Gate" id="{da11fdd3-2150-0a89-86ed-2ffd0f4b683a}">
           <p14:sldIdLst>
             <p14:sldId id="257"/>
             <p14:sldId id="258"/>
           </p14:sldIdLst>
         </p14:section>
-        <p14:section name="Pre-teach" id="{cfb5bedf-969e-f485-5db6-a95c21331e5c}">
+        <p14:section name="Pre-teach" id="{8cd67a07-a2e3-40d5-ac59-564930175faf}">
           <p14:sldIdLst>
             <p14:sldId id="259"/>
           </p14:sldIdLst>
         </p14:section>
-        <p14:section name="Read-along" id="{26957281-0a7a-39cb-4fb3-f86867fd81aa}">
+        <p14:section name="Read-along" id="{fdacb543-0958-a850-fef9-7ae738873ad7}">
           <p14:sldIdLst>
             <p14:sldId id="260"/>
             <p14:sldId id="261"/>
           </p14:sldIdLst>
         </p14:section>
-        <p14:section name="Teach" id="{2b073b1e-cbc1-e80b-2abe-faed22791205}">
+        <p14:section name="Teach" id="{c195a48f-4ae0-079c-f009-83ef89a44fca}">
           <p14:sldIdLst>
             <p14:sldId id="262"/>
             <p14:sldId id="263"/>
             <p14:sldId id="264"/>
           </p14:sldIdLst>
         </p14:section>
-        <p14:section name="Routes" id="{b3b2531c-b4ea-f0e5-69fe-d321615425f9}">
+        <p14:section name="Routes" id="{99fd82ed-5974-cf07-2549-46bbc5657d0e}">
           <p14:sldIdLst>
             <p14:sldId id="265"/>
             <p14:sldId id="266"/>
           </p14:sldIdLst>
         </p14:section>
-        <p14:section name="Close" id="{0c3000f0-3158-08dd-a3a1-31e1840e6ecb}">
+        <p14:section name="Close" id="{aa7ba329-7462-37ed-d60e-cf1aee7e5562}">
           <p14:sldIdLst>
             <p14:sldId id="267"/>
           </p14:sldIdLst>
         </p14:section>
-        <p14:section name="Answers" id="{ab021fa4-6e06-e253-8051-e69ac3296f16}">
+        <p14:section name="Answers" id="{9b0f3790-706a-3616-1c35-e7f96b0d2d59}">
           <p14:sldIdLst>
             <p14:sldId id="268"/>
             <p14:sldId id="269"/>
@@ -944,7 +944,7 @@
             <a:r>
               <a:rPr lang="en-US" dirty="0"/>
               <a:t>Answers — task 1: Add a negative number. Reveal the answer; pupils mark their own work in a different colour, then read the "why" together. Same destination for every lane, so one answer serves the whole class.
-Answer: C   −5
+Answer: A   −5
 Why: 9 + (−14) = 9 − 14. Take 9 to reach zero, then 5 more, so the answer is −5.
 Ask a Support pupil to explain one step, and a Stretch pupil to share their extension.</a:t>
             </a:r>
@@ -1218,7 +1218,7 @@
               <a:rPr lang="en-US" dirty="0"/>
               <a:t>Do now — retrieval. Silent, no notes, no help: recall comes before any support. Give about four minutes.
 1. Work out −2 + 9.  →  7
-2. Work out 4 + (−6).  →  B   −2
+2. Work out 4 + (−6).  →  C   −2
 3. Work out 8 − 11.  →  −3
 Circulate: who gets 3/3 (Stretch route), 2/3 (Core), 0–1 (Support)? Use this to route pupils later in the lesson.</a:t>
             </a:r>
@@ -1310,7 +1310,7 @@
               <a:rPr lang="en-US" dirty="0"/>
               <a:t>Answers — pupils mark their own in a different colour, then hands up for 3/3, 2/3, 1/3.
 1. 7. Move 2 to reach zero, then 7 more.
-2. B   −2. Adding −6 is the same as taking away 6: 4 − 6 = −2.
+2. C   −2. Adding −6 is the same as taking away 6: 4 − 6 = −2.
 3. −3. Take 8 to reach zero, then 3 more. You land on −3.
 Say the route each score points to: 3/3 Stretch, 2/3 Core, 0–1 Support. Pupils may choose to move up.</a:t>
             </a:r>
@@ -3795,7 +3795,7 @@
                 <a:ea typeface="Calibri" pitchFamily="34" charset="-122"/>
                 <a:cs typeface="Calibri" pitchFamily="34" charset="-120"/>
               </a:rPr>
-              <a:t>23      </a:t>
+              <a:t>−5      </a:t>
             </a:r>
             <a:pPr algn="ctr" indent="0" marL="0">
               <a:buNone/>
@@ -3851,7 +3851,7 @@
                 <a:ea typeface="Calibri" pitchFamily="34" charset="-122"/>
                 <a:cs typeface="Calibri" pitchFamily="34" charset="-120"/>
               </a:rPr>
-              <a:t>−5      </a:t>
+              <a:t>−23      </a:t>
             </a:r>
             <a:pPr algn="ctr" indent="0" marL="0">
               <a:buNone/>
@@ -3879,7 +3879,7 @@
                 <a:ea typeface="Calibri" pitchFamily="34" charset="-122"/>
                 <a:cs typeface="Calibri" pitchFamily="34" charset="-120"/>
               </a:rPr>
-              <a:t>−23</a:t>
+              <a:t>23</a:t>
             </a:r>
             <a:endParaRPr lang="en-US" sz="2000" dirty="0"/>
           </a:p>
@@ -6259,7 +6259,7 @@
                 <a:ea typeface="Cambria" pitchFamily="34" charset="-122"/>
                 <a:cs typeface="Cambria" pitchFamily="34" charset="-120"/>
               </a:rPr>
-              <a:t>C   −5</a:t>
+              <a:t>A   −5</a:t>
             </a:r>
             <a:endParaRPr lang="en-US" sz="1800" dirty="0"/>
           </a:p>
@@ -7946,7 +7946,7 @@
                 <a:ea typeface="Calibri" pitchFamily="34" charset="-122"/>
                 <a:cs typeface="Calibri" pitchFamily="34" charset="-120"/>
               </a:rPr>
-              <a:t>−2</a:t>
+              <a:t>−10</a:t>
             </a:r>
             <a:endParaRPr lang="en-US" sz="2400" dirty="0"/>
           </a:p>
@@ -7983,7 +7983,7 @@
                 <a:ea typeface="Calibri" pitchFamily="34" charset="-122"/>
                 <a:cs typeface="Calibri" pitchFamily="34" charset="-120"/>
               </a:rPr>
-              <a:t>2</a:t>
+              <a:t>−2</a:t>
             </a:r>
             <a:endParaRPr lang="en-US" sz="2400" dirty="0"/>
           </a:p>
@@ -8020,7 +8020,7 @@
                 <a:ea typeface="Calibri" pitchFamily="34" charset="-122"/>
                 <a:cs typeface="Calibri" pitchFamily="34" charset="-120"/>
               </a:rPr>
-              <a:t>−10</a:t>
+              <a:t>2</a:t>
             </a:r>
             <a:endParaRPr lang="en-US" sz="2400" dirty="0"/>
           </a:p>
@@ -8869,7 +8869,7 @@
                 <a:ea typeface="Calibri" pitchFamily="34" charset="-122"/>
                 <a:cs typeface="Calibri" pitchFamily="34" charset="-120"/>
               </a:rPr>
-              <a:t>B   −2</a:t>
+              <a:t>C   −2</a:t>
             </a:r>
             <a:endParaRPr lang="en-US" sz="2200" dirty="0"/>
           </a:p>

--- a/decks/maths-directed/maths-directed_ch3_adding.pptx
+++ b/decks/maths-directed/maths-directed_ch3_adding.pptx
@@ -121,47 +121,47 @@
   <p:extLst>
     <p:ext uri="{521415D9-36F7-43E2-AB2F-B90AF26B5E84}">
       <p14:sectionLst xmlns:p14="http://schemas.microsoft.com/office/powerpoint/2010/main">
-        <p14:section name="Opening" id="{f18a30ad-c4c8-b7a2-e234-34dfbde3468e}">
+        <p14:section name="Opening" id="{8454e0c9-9a5c-dd12-b76e-f93a10f2c162}">
           <p14:sldIdLst>
             <p14:sldId id="256"/>
           </p14:sldIdLst>
         </p14:section>
-        <p14:section name="Gate" id="{da11fdd3-2150-0a89-86ed-2ffd0f4b683a}">
+        <p14:section name="Gate" id="{1c9184c4-5de8-55cb-068a-c6d37c1bb6e5}">
           <p14:sldIdLst>
             <p14:sldId id="257"/>
             <p14:sldId id="258"/>
           </p14:sldIdLst>
         </p14:section>
-        <p14:section name="Pre-teach" id="{8cd67a07-a2e3-40d5-ac59-564930175faf}">
+        <p14:section name="Pre-teach" id="{6fff6471-dfae-b06f-2dc1-45e1e4e5f949}">
           <p14:sldIdLst>
             <p14:sldId id="259"/>
           </p14:sldIdLst>
         </p14:section>
-        <p14:section name="Read-along" id="{fdacb543-0958-a850-fef9-7ae738873ad7}">
+        <p14:section name="Read-along" id="{a029296b-c706-ae1e-3b08-969e2b45013b}">
           <p14:sldIdLst>
             <p14:sldId id="260"/>
             <p14:sldId id="261"/>
           </p14:sldIdLst>
         </p14:section>
-        <p14:section name="Teach" id="{c195a48f-4ae0-079c-f009-83ef89a44fca}">
+        <p14:section name="Teach" id="{bd54d9f9-3cde-eea5-f4a6-1eaf7d549111}">
           <p14:sldIdLst>
             <p14:sldId id="262"/>
             <p14:sldId id="263"/>
             <p14:sldId id="264"/>
           </p14:sldIdLst>
         </p14:section>
-        <p14:section name="Routes" id="{99fd82ed-5974-cf07-2549-46bbc5657d0e}">
+        <p14:section name="Routes" id="{f97acf26-a862-7d30-41c4-fc1e15c222bf}">
           <p14:sldIdLst>
             <p14:sldId id="265"/>
             <p14:sldId id="266"/>
           </p14:sldIdLst>
         </p14:section>
-        <p14:section name="Close" id="{aa7ba329-7462-37ed-d60e-cf1aee7e5562}">
+        <p14:section name="Close" id="{7cb20bfa-8a82-a61c-cc30-7b405e7bbcb9}">
           <p14:sldIdLst>
             <p14:sldId id="267"/>
           </p14:sldIdLst>
         </p14:section>
-        <p14:section name="Answers" id="{9b0f3790-706a-3616-1c35-e7f96b0d2d59}">
+        <p14:section name="Answers" id="{9f5d8b2a-32b1-f084-abcc-ee3c28535f5e}">
           <p14:sldIdLst>
             <p14:sldId id="268"/>
             <p14:sldId id="269"/>
